--- a/make_presentation/templates/templates/creative/no_logo_7.pptx
+++ b/make_presentation/templates/templates/creative/no_logo_7.pptx
@@ -73,19 +73,7 @@
               <a:rPr b="0" lang="en-US" sz="4400" spc="-1" strike="noStrike">
                 <a:latin typeface="Arial"/>
               </a:rPr>
-              <a:t>Click to </a:t>
-            </a:r>
-            <a:r>
-              <a:rPr b="0" lang="en-US" sz="4400" spc="-1" strike="noStrike">
-                <a:latin typeface="Arial"/>
-              </a:rPr>
-              <a:t>move </a:t>
-            </a:r>
-            <a:r>
-              <a:rPr b="0" lang="en-US" sz="4400" spc="-1" strike="noStrike">
-                <a:latin typeface="Arial"/>
-              </a:rPr>
-              <a:t>the slide</a:t>
+              <a:t>Click to move the slide</a:t>
             </a:r>
             <a:endParaRPr b="0" lang="en-US" sz="4400" spc="-1" strike="noStrike">
               <a:latin typeface="Arial"/>
@@ -125,13 +113,7 @@
               <a:rPr b="0" lang="en-US" sz="2000" spc="-1" strike="noStrike">
                 <a:latin typeface="Arial"/>
               </a:rPr>
-              <a:t>Click to edit the </a:t>
-            </a:r>
-            <a:r>
-              <a:rPr b="0" lang="en-US" sz="2000" spc="-1" strike="noStrike">
-                <a:latin typeface="Arial"/>
-              </a:rPr>
-              <a:t>notes format</a:t>
+              <a:t>Click to edit the notes format</a:t>
             </a:r>
             <a:endParaRPr b="0" lang="en-US" sz="2000" spc="-1" strike="noStrike">
               <a:latin typeface="Arial"/>
@@ -316,7 +298,7 @@
             <a:pPr algn="r">
               <a:buNone/>
             </a:pPr>
-            <a:fld id="{4B998EAF-16BC-4377-9304-34C44912FD74}" type="slidenum">
+            <a:fld id="{76A17475-BF3C-484E-AB3C-1FB3DFD97D4B}" type="slidenum">
               <a:rPr b="0" lang="en-US" sz="1400" spc="-1" strike="noStrike">
                 <a:latin typeface="Times New Roman"/>
               </a:rPr>
@@ -364,7 +346,7 @@
         <p:spPr>
           <a:xfrm>
             <a:off x="685800" y="1143000"/>
-            <a:ext cx="5485680" cy="3085560"/>
+            <a:ext cx="5485320" cy="3085200"/>
           </a:xfrm>
           <a:prstGeom prst="rect">
             <a:avLst/>
@@ -387,7 +369,7 @@
         <p:spPr>
           <a:xfrm>
             <a:off x="685800" y="4400640"/>
-            <a:ext cx="5485680" cy="3599640"/>
+            <a:ext cx="5485320" cy="3599280"/>
           </a:xfrm>
           <a:prstGeom prst="rect">
             <a:avLst/>
@@ -421,7 +403,7 @@
         <p:spPr>
           <a:xfrm>
             <a:off x="3884760" y="8685360"/>
-            <a:ext cx="2971080" cy="457920"/>
+            <a:ext cx="2970720" cy="457560"/>
           </a:xfrm>
           <a:prstGeom prst="rect">
             <a:avLst/>
@@ -453,7 +435,7 @@
               </a:lnSpc>
               <a:buNone/>
             </a:pPr>
-            <a:fld id="{75E16DDE-E12B-4E3A-95E7-51353E589611}" type="slidenum">
+            <a:fld id="{AF6D80B8-33C2-462F-A1A1-33C10B5CBF49}" type="slidenum">
               <a:rPr b="0" lang="ru-RU" sz="1200" spc="-1" strike="noStrike">
                 <a:latin typeface="Times New Roman"/>
               </a:rPr>
@@ -500,7 +482,7 @@
         <p:spPr>
           <a:xfrm>
             <a:off x="685800" y="1143000"/>
-            <a:ext cx="5485680" cy="3085560"/>
+            <a:ext cx="5485320" cy="3085200"/>
           </a:xfrm>
           <a:prstGeom prst="rect">
             <a:avLst/>
@@ -523,7 +505,7 @@
         <p:spPr>
           <a:xfrm>
             <a:off x="685800" y="4400640"/>
-            <a:ext cx="5485680" cy="3599640"/>
+            <a:ext cx="5485320" cy="3599280"/>
           </a:xfrm>
           <a:prstGeom prst="rect">
             <a:avLst/>
@@ -557,7 +539,7 @@
         <p:spPr>
           <a:xfrm>
             <a:off x="3884760" y="8685360"/>
-            <a:ext cx="2971080" cy="457920"/>
+            <a:ext cx="2970720" cy="457560"/>
           </a:xfrm>
           <a:prstGeom prst="rect">
             <a:avLst/>
@@ -589,7 +571,7 @@
               </a:lnSpc>
               <a:buNone/>
             </a:pPr>
-            <a:fld id="{453AE673-2174-466A-A341-F70E16AB9A38}" type="slidenum">
+            <a:fld id="{0B44683E-E083-474B-86F1-5FAADAA1D320}" type="slidenum">
               <a:rPr b="0" lang="ru-RU" sz="1200" spc="-1" strike="noStrike">
                 <a:latin typeface="Times New Roman"/>
               </a:rPr>
@@ -657,7 +639,7 @@
         <p:txBody>
           <a:bodyPr/>
           <a:p>
-            <a:fld id="{F595F371-1555-4313-88BE-B810D83E8E6F}" type="slidenum">
+            <a:fld id="{EA740264-9D86-46D9-A39A-310AFD824F63}" type="slidenum">
               <a:t>&lt;#&gt;</a:t>
             </a:fld>
           </a:p>
@@ -719,7 +701,7 @@
         <p:spPr>
           <a:xfrm>
             <a:off x="1143000" y="841680"/>
-            <a:ext cx="6857280" cy="1789920"/>
+            <a:ext cx="6856920" cy="1789560"/>
           </a:xfrm>
           <a:prstGeom prst="rect">
             <a:avLst/>
@@ -756,7 +738,7 @@
         <p:spPr>
           <a:xfrm>
             <a:off x="457200" y="1203480"/>
-            <a:ext cx="8229240" cy="1422720"/>
+            <a:ext cx="8228880" cy="1422360"/>
           </a:xfrm>
           <a:prstGeom prst="rect">
             <a:avLst/>
@@ -789,8 +771,8 @@
         </p:nvSpPr>
         <p:spPr>
           <a:xfrm>
-            <a:off x="457200" y="2761920"/>
-            <a:ext cx="8229240" cy="1422720"/>
+            <a:off x="457200" y="2761200"/>
+            <a:ext cx="8228880" cy="1422360"/>
           </a:xfrm>
           <a:prstGeom prst="rect">
             <a:avLst/>
@@ -845,7 +827,7 @@
         <p:txBody>
           <a:bodyPr/>
           <a:p>
-            <a:fld id="{2C28EB8D-8CAB-4A6D-8087-6AAC0BAF0C5D}" type="slidenum">
+            <a:fld id="{CABECC95-739F-47F6-A074-2E3212D63A13}" type="slidenum">
               <a:t>&lt;#&gt;</a:t>
             </a:fld>
           </a:p>
@@ -907,7 +889,7 @@
         <p:spPr>
           <a:xfrm>
             <a:off x="1143000" y="841680"/>
-            <a:ext cx="6857280" cy="1789920"/>
+            <a:ext cx="6856920" cy="1789560"/>
           </a:xfrm>
           <a:prstGeom prst="rect">
             <a:avLst/>
@@ -944,7 +926,7 @@
         <p:spPr>
           <a:xfrm>
             <a:off x="457200" y="1203480"/>
-            <a:ext cx="4015800" cy="1422720"/>
+            <a:ext cx="4015440" cy="1422360"/>
           </a:xfrm>
           <a:prstGeom prst="rect">
             <a:avLst/>
@@ -977,8 +959,8 @@
         </p:nvSpPr>
         <p:spPr>
           <a:xfrm>
-            <a:off x="4674240" y="1203480"/>
-            <a:ext cx="4015800" cy="1422720"/>
+            <a:off x="4673880" y="1203480"/>
+            <a:ext cx="4015440" cy="1422360"/>
           </a:xfrm>
           <a:prstGeom prst="rect">
             <a:avLst/>
@@ -1011,8 +993,8 @@
         </p:nvSpPr>
         <p:spPr>
           <a:xfrm>
-            <a:off x="457200" y="2761920"/>
-            <a:ext cx="4015800" cy="1422720"/>
+            <a:off x="457200" y="2761200"/>
+            <a:ext cx="4015440" cy="1422360"/>
           </a:xfrm>
           <a:prstGeom prst="rect">
             <a:avLst/>
@@ -1045,8 +1027,8 @@
         </p:nvSpPr>
         <p:spPr>
           <a:xfrm>
-            <a:off x="4674240" y="2761920"/>
-            <a:ext cx="4015800" cy="1422720"/>
+            <a:off x="4673880" y="2761200"/>
+            <a:ext cx="4015440" cy="1422360"/>
           </a:xfrm>
           <a:prstGeom prst="rect">
             <a:avLst/>
@@ -1101,7 +1083,7 @@
         <p:txBody>
           <a:bodyPr/>
           <a:p>
-            <a:fld id="{21BC6234-9837-4AA4-9470-7AD1DC5E21D0}" type="slidenum">
+            <a:fld id="{595D6647-79B1-4027-B8CC-67A70014FB1A}" type="slidenum">
               <a:t>&lt;#&gt;</a:t>
             </a:fld>
           </a:p>
@@ -1163,7 +1145,7 @@
         <p:spPr>
           <a:xfrm>
             <a:off x="1143000" y="841680"/>
-            <a:ext cx="6857280" cy="1789920"/>
+            <a:ext cx="6856920" cy="1789560"/>
           </a:xfrm>
           <a:prstGeom prst="rect">
             <a:avLst/>
@@ -1200,7 +1182,7 @@
         <p:spPr>
           <a:xfrm>
             <a:off x="457200" y="1203480"/>
-            <a:ext cx="2649600" cy="1422720"/>
+            <a:ext cx="2649600" cy="1422360"/>
           </a:xfrm>
           <a:prstGeom prst="rect">
             <a:avLst/>
@@ -1234,7 +1216,7 @@
         <p:spPr>
           <a:xfrm>
             <a:off x="3239640" y="1203480"/>
-            <a:ext cx="2649600" cy="1422720"/>
+            <a:ext cx="2649600" cy="1422360"/>
           </a:xfrm>
           <a:prstGeom prst="rect">
             <a:avLst/>
@@ -1268,7 +1250,7 @@
         <p:spPr>
           <a:xfrm>
             <a:off x="6022080" y="1203480"/>
-            <a:ext cx="2649600" cy="1422720"/>
+            <a:ext cx="2649600" cy="1422360"/>
           </a:xfrm>
           <a:prstGeom prst="rect">
             <a:avLst/>
@@ -1301,8 +1283,8 @@
         </p:nvSpPr>
         <p:spPr>
           <a:xfrm>
-            <a:off x="457200" y="2761920"/>
-            <a:ext cx="2649600" cy="1422720"/>
+            <a:off x="457200" y="2761200"/>
+            <a:ext cx="2649600" cy="1422360"/>
           </a:xfrm>
           <a:prstGeom prst="rect">
             <a:avLst/>
@@ -1335,8 +1317,8 @@
         </p:nvSpPr>
         <p:spPr>
           <a:xfrm>
-            <a:off x="3239640" y="2761920"/>
-            <a:ext cx="2649600" cy="1422720"/>
+            <a:off x="3239640" y="2761200"/>
+            <a:ext cx="2649600" cy="1422360"/>
           </a:xfrm>
           <a:prstGeom prst="rect">
             <a:avLst/>
@@ -1369,8 +1351,8 @@
         </p:nvSpPr>
         <p:spPr>
           <a:xfrm>
-            <a:off x="6022080" y="2761920"/>
-            <a:ext cx="2649600" cy="1422720"/>
+            <a:off x="6022080" y="2761200"/>
+            <a:ext cx="2649600" cy="1422360"/>
           </a:xfrm>
           <a:prstGeom prst="rect">
             <a:avLst/>
@@ -1425,7 +1407,7 @@
         <p:txBody>
           <a:bodyPr/>
           <a:p>
-            <a:fld id="{01900F3C-6F44-40FF-AF3E-4A74B243095E}" type="slidenum">
+            <a:fld id="{07A1019B-7112-4E55-9982-F3AF8B6AE71A}" type="slidenum">
               <a:t>&lt;#&gt;</a:t>
             </a:fld>
           </a:p>
@@ -1487,7 +1469,7 @@
         <p:spPr>
           <a:xfrm>
             <a:off x="1143000" y="841680"/>
-            <a:ext cx="6857280" cy="1789920"/>
+            <a:ext cx="6856920" cy="1789560"/>
           </a:xfrm>
           <a:prstGeom prst="rect">
             <a:avLst/>
@@ -1524,7 +1506,7 @@
         <p:spPr>
           <a:xfrm>
             <a:off x="457200" y="1203480"/>
-            <a:ext cx="8229240" cy="2982960"/>
+            <a:ext cx="8228880" cy="2982600"/>
           </a:xfrm>
           <a:prstGeom prst="rect">
             <a:avLst/>
@@ -1582,7 +1564,7 @@
         <p:txBody>
           <a:bodyPr/>
           <a:p>
-            <a:fld id="{DAA1A77D-1287-4397-A421-F06B291F7A82}" type="slidenum">
+            <a:fld id="{3AF87A56-95AD-4208-B98C-C05115933728}" type="slidenum">
               <a:t>&lt;#&gt;</a:t>
             </a:fld>
           </a:p>
@@ -1644,7 +1626,7 @@
         <p:spPr>
           <a:xfrm>
             <a:off x="1143000" y="841680"/>
-            <a:ext cx="6857280" cy="1789920"/>
+            <a:ext cx="6856920" cy="1789560"/>
           </a:xfrm>
           <a:prstGeom prst="rect">
             <a:avLst/>
@@ -1681,7 +1663,7 @@
         <p:spPr>
           <a:xfrm>
             <a:off x="457200" y="1203480"/>
-            <a:ext cx="8229240" cy="2982960"/>
+            <a:ext cx="8228880" cy="2982600"/>
           </a:xfrm>
           <a:prstGeom prst="rect">
             <a:avLst/>
@@ -1736,7 +1718,7 @@
         <p:txBody>
           <a:bodyPr/>
           <a:p>
-            <a:fld id="{14C45160-D284-4D89-B75B-138E16581CCE}" type="slidenum">
+            <a:fld id="{2206E8C3-9A9C-4584-ABFE-72419000DD16}" type="slidenum">
               <a:t>&lt;#&gt;</a:t>
             </a:fld>
           </a:p>
@@ -1798,7 +1780,7 @@
         <p:spPr>
           <a:xfrm>
             <a:off x="1143000" y="841680"/>
-            <a:ext cx="6857280" cy="1789920"/>
+            <a:ext cx="6856920" cy="1789560"/>
           </a:xfrm>
           <a:prstGeom prst="rect">
             <a:avLst/>
@@ -1835,7 +1817,7 @@
         <p:spPr>
           <a:xfrm>
             <a:off x="457200" y="1203480"/>
-            <a:ext cx="4015800" cy="2982960"/>
+            <a:ext cx="4015440" cy="2982600"/>
           </a:xfrm>
           <a:prstGeom prst="rect">
             <a:avLst/>
@@ -1868,8 +1850,8 @@
         </p:nvSpPr>
         <p:spPr>
           <a:xfrm>
-            <a:off x="4674240" y="1203480"/>
-            <a:ext cx="4015800" cy="2982960"/>
+            <a:off x="4673880" y="1203480"/>
+            <a:ext cx="4015440" cy="2982600"/>
           </a:xfrm>
           <a:prstGeom prst="rect">
             <a:avLst/>
@@ -1924,7 +1906,7 @@
         <p:txBody>
           <a:bodyPr/>
           <a:p>
-            <a:fld id="{56536231-DDAF-4598-A5BD-0FE3E8EEB9E4}" type="slidenum">
+            <a:fld id="{61422C3D-9361-4901-9E1A-464004A1A734}" type="slidenum">
               <a:t>&lt;#&gt;</a:t>
             </a:fld>
           </a:p>
@@ -1986,7 +1968,7 @@
         <p:spPr>
           <a:xfrm>
             <a:off x="1143000" y="841680"/>
-            <a:ext cx="6857280" cy="1789920"/>
+            <a:ext cx="6856920" cy="1789560"/>
           </a:xfrm>
           <a:prstGeom prst="rect">
             <a:avLst/>
@@ -2044,7 +2026,7 @@
         <p:txBody>
           <a:bodyPr/>
           <a:p>
-            <a:fld id="{CDE6F7DB-1F0E-4440-9343-5769CA0D82F6}" type="slidenum">
+            <a:fld id="{D07C7458-2B1E-42E2-9119-C396760317E2}" type="slidenum">
               <a:t>&lt;#&gt;</a:t>
             </a:fld>
           </a:p>
@@ -2106,7 +2088,7 @@
         <p:spPr>
           <a:xfrm>
             <a:off x="1143000" y="841680"/>
-            <a:ext cx="6857280" cy="8298360"/>
+            <a:ext cx="6856920" cy="8296560"/>
           </a:xfrm>
           <a:prstGeom prst="rect">
             <a:avLst/>
@@ -2164,7 +2146,7 @@
         <p:txBody>
           <a:bodyPr/>
           <a:p>
-            <a:fld id="{E51FC3CD-F187-41F9-9C93-11E16D72B9C8}" type="slidenum">
+            <a:fld id="{5F14CFB4-6EB2-43EF-81C1-82BCF3C128BB}" type="slidenum">
               <a:t>&lt;#&gt;</a:t>
             </a:fld>
           </a:p>
@@ -2226,7 +2208,7 @@
         <p:spPr>
           <a:xfrm>
             <a:off x="1143000" y="841680"/>
-            <a:ext cx="6857280" cy="1789920"/>
+            <a:ext cx="6856920" cy="1789560"/>
           </a:xfrm>
           <a:prstGeom prst="rect">
             <a:avLst/>
@@ -2263,7 +2245,7 @@
         <p:spPr>
           <a:xfrm>
             <a:off x="457200" y="1203480"/>
-            <a:ext cx="4015800" cy="1422720"/>
+            <a:ext cx="4015440" cy="1422360"/>
           </a:xfrm>
           <a:prstGeom prst="rect">
             <a:avLst/>
@@ -2296,8 +2278,8 @@
         </p:nvSpPr>
         <p:spPr>
           <a:xfrm>
-            <a:off x="4674240" y="1203480"/>
-            <a:ext cx="4015800" cy="2982960"/>
+            <a:off x="4673880" y="1203480"/>
+            <a:ext cx="4015440" cy="2982600"/>
           </a:xfrm>
           <a:prstGeom prst="rect">
             <a:avLst/>
@@ -2330,8 +2312,8 @@
         </p:nvSpPr>
         <p:spPr>
           <a:xfrm>
-            <a:off x="457200" y="2761920"/>
-            <a:ext cx="4015800" cy="1422720"/>
+            <a:off x="457200" y="2761200"/>
+            <a:ext cx="4015440" cy="1422360"/>
           </a:xfrm>
           <a:prstGeom prst="rect">
             <a:avLst/>
@@ -2386,7 +2368,7 @@
         <p:txBody>
           <a:bodyPr/>
           <a:p>
-            <a:fld id="{A6D81903-4831-4464-B189-414AACAC86E3}" type="slidenum">
+            <a:fld id="{4B4EA744-2D36-4A6A-B7B1-F223D545C03D}" type="slidenum">
               <a:t>&lt;#&gt;</a:t>
             </a:fld>
           </a:p>
@@ -2448,7 +2430,7 @@
         <p:spPr>
           <a:xfrm>
             <a:off x="1143000" y="841680"/>
-            <a:ext cx="6857280" cy="1789920"/>
+            <a:ext cx="6856920" cy="1789560"/>
           </a:xfrm>
           <a:prstGeom prst="rect">
             <a:avLst/>
@@ -2485,7 +2467,7 @@
         <p:spPr>
           <a:xfrm>
             <a:off x="457200" y="1203480"/>
-            <a:ext cx="4015800" cy="2982960"/>
+            <a:ext cx="4015440" cy="2982600"/>
           </a:xfrm>
           <a:prstGeom prst="rect">
             <a:avLst/>
@@ -2518,8 +2500,8 @@
         </p:nvSpPr>
         <p:spPr>
           <a:xfrm>
-            <a:off x="4674240" y="1203480"/>
-            <a:ext cx="4015800" cy="1422720"/>
+            <a:off x="4673880" y="1203480"/>
+            <a:ext cx="4015440" cy="1422360"/>
           </a:xfrm>
           <a:prstGeom prst="rect">
             <a:avLst/>
@@ -2552,8 +2534,8 @@
         </p:nvSpPr>
         <p:spPr>
           <a:xfrm>
-            <a:off x="4674240" y="2761920"/>
-            <a:ext cx="4015800" cy="1422720"/>
+            <a:off x="4673880" y="2761200"/>
+            <a:ext cx="4015440" cy="1422360"/>
           </a:xfrm>
           <a:prstGeom prst="rect">
             <a:avLst/>
@@ -2608,7 +2590,7 @@
         <p:txBody>
           <a:bodyPr/>
           <a:p>
-            <a:fld id="{BCADEFC9-E80D-4303-B011-D6777D4F7DD2}" type="slidenum">
+            <a:fld id="{A73458E7-C313-4BAA-88F9-6DC03DA3E816}" type="slidenum">
               <a:t>&lt;#&gt;</a:t>
             </a:fld>
           </a:p>
@@ -2670,7 +2652,7 @@
         <p:spPr>
           <a:xfrm>
             <a:off x="1143000" y="841680"/>
-            <a:ext cx="6857280" cy="1789920"/>
+            <a:ext cx="6856920" cy="1789560"/>
           </a:xfrm>
           <a:prstGeom prst="rect">
             <a:avLst/>
@@ -2707,7 +2689,7 @@
         <p:spPr>
           <a:xfrm>
             <a:off x="457200" y="1203480"/>
-            <a:ext cx="4015800" cy="1422720"/>
+            <a:ext cx="4015440" cy="1422360"/>
           </a:xfrm>
           <a:prstGeom prst="rect">
             <a:avLst/>
@@ -2740,8 +2722,8 @@
         </p:nvSpPr>
         <p:spPr>
           <a:xfrm>
-            <a:off x="4674240" y="1203480"/>
-            <a:ext cx="4015800" cy="1422720"/>
+            <a:off x="4673880" y="1203480"/>
+            <a:ext cx="4015440" cy="1422360"/>
           </a:xfrm>
           <a:prstGeom prst="rect">
             <a:avLst/>
@@ -2774,8 +2756,8 @@
         </p:nvSpPr>
         <p:spPr>
           <a:xfrm>
-            <a:off x="457200" y="2761920"/>
-            <a:ext cx="8229240" cy="1422720"/>
+            <a:off x="457200" y="2761200"/>
+            <a:ext cx="8228880" cy="1422360"/>
           </a:xfrm>
           <a:prstGeom prst="rect">
             <a:avLst/>
@@ -2830,7 +2812,7 @@
         <p:txBody>
           <a:bodyPr/>
           <a:p>
-            <a:fld id="{30E73E38-60A2-462F-A437-74E36E2B026F}" type="slidenum">
+            <a:fld id="{9E514661-7353-4B3C-ADA2-D4382E160C4D}" type="slidenum">
               <a:t>&lt;#&gt;</a:t>
             </a:fld>
           </a:p>
@@ -2899,7 +2881,7 @@
         <p:spPr>
           <a:xfrm>
             <a:off x="1143000" y="841680"/>
-            <a:ext cx="6857280" cy="1789920"/>
+            <a:ext cx="6856920" cy="1789560"/>
           </a:xfrm>
           <a:prstGeom prst="rect">
             <a:avLst/>
@@ -2918,85 +2900,7 @@
               <a:rPr b="0" lang="en-US" sz="1800" spc="-1" strike="noStrike">
                 <a:latin typeface="Arial"/>
               </a:rPr>
-              <a:t>Cli</a:t>
-            </a:r>
-            <a:r>
-              <a:rPr b="0" lang="en-US" sz="1800" spc="-1" strike="noStrike">
-                <a:latin typeface="Arial"/>
-              </a:rPr>
-              <a:t>ck </a:t>
-            </a:r>
-            <a:r>
-              <a:rPr b="0" lang="en-US" sz="1800" spc="-1" strike="noStrike">
-                <a:latin typeface="Arial"/>
-              </a:rPr>
-              <a:t>to </a:t>
-            </a:r>
-            <a:r>
-              <a:rPr b="0" lang="en-US" sz="1800" spc="-1" strike="noStrike">
-                <a:latin typeface="Arial"/>
-              </a:rPr>
-              <a:t>edi</a:t>
-            </a:r>
-            <a:r>
-              <a:rPr b="0" lang="en-US" sz="1800" spc="-1" strike="noStrike">
-                <a:latin typeface="Arial"/>
-              </a:rPr>
-              <a:t>t </a:t>
-            </a:r>
-            <a:r>
-              <a:rPr b="0" lang="en-US" sz="1800" spc="-1" strike="noStrike">
-                <a:latin typeface="Arial"/>
-              </a:rPr>
-              <a:t>th</a:t>
-            </a:r>
-            <a:r>
-              <a:rPr b="0" lang="en-US" sz="1800" spc="-1" strike="noStrike">
-                <a:latin typeface="Arial"/>
-              </a:rPr>
-              <a:t>e </a:t>
-            </a:r>
-            <a:r>
-              <a:rPr b="0" lang="en-US" sz="1800" spc="-1" strike="noStrike">
-                <a:latin typeface="Arial"/>
-              </a:rPr>
-              <a:t>titl</a:t>
-            </a:r>
-            <a:r>
-              <a:rPr b="0" lang="en-US" sz="1800" spc="-1" strike="noStrike">
-                <a:latin typeface="Arial"/>
-              </a:rPr>
-              <a:t>e </a:t>
-            </a:r>
-            <a:r>
-              <a:rPr b="0" lang="en-US" sz="1800" spc="-1" strike="noStrike">
-                <a:latin typeface="Arial"/>
-              </a:rPr>
-              <a:t>tex</a:t>
-            </a:r>
-            <a:r>
-              <a:rPr b="0" lang="en-US" sz="1800" spc="-1" strike="noStrike">
-                <a:latin typeface="Arial"/>
-              </a:rPr>
-              <a:t>t </a:t>
-            </a:r>
-            <a:r>
-              <a:rPr b="0" lang="en-US" sz="1800" spc="-1" strike="noStrike">
-                <a:latin typeface="Arial"/>
-              </a:rPr>
-              <a:t>for</a:t>
-            </a:r>
-            <a:r>
-              <a:rPr b="0" lang="en-US" sz="1800" spc="-1" strike="noStrike">
-                <a:latin typeface="Arial"/>
-              </a:rPr>
-              <a:t>m</a:t>
-            </a:r>
-            <a:r>
-              <a:rPr b="0" lang="en-US" sz="1800" spc="-1" strike="noStrike">
-                <a:latin typeface="Arial"/>
-              </a:rPr>
-              <a:t>at</a:t>
+              <a:t>Click to edit the title text format</a:t>
             </a:r>
             <a:endParaRPr b="0" lang="en-US" sz="1800" spc="-1" strike="noStrike">
               <a:latin typeface="Arial"/>
@@ -3011,180 +2915,13 @@
             <a:spLocks noGrp="1"/>
           </p:cNvSpPr>
           <p:nvPr>
-            <p:ph type="ftr" idx="1"/>
-          </p:nvPr>
-        </p:nvSpPr>
-        <p:spPr>
-          <a:xfrm>
-            <a:off x="3029040" y="4767120"/>
-            <a:ext cx="3085560" cy="273240"/>
-          </a:xfrm>
-          <a:prstGeom prst="rect">
-            <a:avLst/>
-          </a:prstGeom>
-          <a:noFill/>
-          <a:ln w="0">
-            <a:noFill/>
-          </a:ln>
-        </p:spPr>
-        <p:txBody>
-          <a:bodyPr lIns="90000" rIns="90000" tIns="45000" bIns="45000" anchor="ctr">
-            <a:noAutofit/>
-          </a:bodyPr>
-          <a:lstStyle>
-            <a:lvl1pPr algn="ctr">
-              <a:lnSpc>
-                <a:spcPct val="100000"/>
-              </a:lnSpc>
-              <a:buNone/>
-              <a:defRPr b="0" lang="en-US" sz="1400" spc="-1" strike="noStrike">
-                <a:latin typeface="Times New Roman"/>
-              </a:defRPr>
-            </a:lvl1pPr>
-          </a:lstStyle>
-          <a:p>
-            <a:pPr algn="ctr">
-              <a:lnSpc>
-                <a:spcPct val="100000"/>
-              </a:lnSpc>
-              <a:buNone/>
-            </a:pPr>
-            <a:r>
-              <a:rPr b="0" lang="en-US" sz="1400" spc="-1" strike="noStrike">
-                <a:latin typeface="Times New Roman"/>
-              </a:rPr>
-              <a:t>&lt;footer&gt;</a:t>
-            </a:r>
-            <a:endParaRPr b="0" lang="en-US" sz="1400" spc="-1" strike="noStrike">
-              <a:latin typeface="Times New Roman"/>
-            </a:endParaRPr>
-          </a:p>
-        </p:txBody>
-      </p:sp>
-      <p:sp>
-        <p:nvSpPr>
-          <p:cNvPr id="2" name="PlaceHolder 3"/>
-          <p:cNvSpPr>
-            <a:spLocks noGrp="1"/>
-          </p:cNvSpPr>
-          <p:nvPr>
-            <p:ph type="sldNum" idx="2"/>
-          </p:nvPr>
-        </p:nvSpPr>
-        <p:spPr>
-          <a:xfrm>
-            <a:off x="6458040" y="4767120"/>
-            <a:ext cx="2056680" cy="273240"/>
-          </a:xfrm>
-          <a:prstGeom prst="rect">
-            <a:avLst/>
-          </a:prstGeom>
-          <a:noFill/>
-          <a:ln w="0">
-            <a:noFill/>
-          </a:ln>
-        </p:spPr>
-        <p:txBody>
-          <a:bodyPr lIns="90000" rIns="90000" tIns="45000" bIns="45000" anchor="ctr">
-            <a:noAutofit/>
-          </a:bodyPr>
-          <a:lstStyle>
-            <a:lvl1pPr algn="r">
-              <a:lnSpc>
-                <a:spcPct val="100000"/>
-              </a:lnSpc>
-              <a:buNone/>
-              <a:defRPr b="0" lang="en-US" sz="900" spc="-1" strike="noStrike">
-                <a:solidFill>
-                  <a:srgbClr val="8b8b8b"/>
-                </a:solidFill>
-                <a:latin typeface="Calibri"/>
-              </a:defRPr>
-            </a:lvl1pPr>
-          </a:lstStyle>
-          <a:p>
-            <a:pPr algn="r">
-              <a:lnSpc>
-                <a:spcPct val="100000"/>
-              </a:lnSpc>
-              <a:buNone/>
-            </a:pPr>
-            <a:fld id="{A1A9AD26-E678-4DF7-8B97-6513B67335E8}" type="slidenum">
-              <a:rPr b="0" lang="en-US" sz="900" spc="-1" strike="noStrike">
-                <a:solidFill>
-                  <a:srgbClr val="8b8b8b"/>
-                </a:solidFill>
-                <a:latin typeface="Calibri"/>
-              </a:rPr>
-              <a:t>&lt;number&gt;</a:t>
-            </a:fld>
-            <a:endParaRPr b="0" lang="en-US" sz="900" spc="-1" strike="noStrike">
-              <a:latin typeface="Times New Roman"/>
-            </a:endParaRPr>
-          </a:p>
-        </p:txBody>
-      </p:sp>
-      <p:sp>
-        <p:nvSpPr>
-          <p:cNvPr id="3" name="PlaceHolder 4"/>
-          <p:cNvSpPr>
-            <a:spLocks noGrp="1"/>
-          </p:cNvSpPr>
-          <p:nvPr>
-            <p:ph type="dt" idx="3"/>
-          </p:nvPr>
-        </p:nvSpPr>
-        <p:spPr>
-          <a:xfrm>
-            <a:off x="628560" y="4767120"/>
-            <a:ext cx="2056680" cy="273240"/>
-          </a:xfrm>
-          <a:prstGeom prst="rect">
-            <a:avLst/>
-          </a:prstGeom>
-          <a:noFill/>
-          <a:ln w="0">
-            <a:noFill/>
-          </a:ln>
-        </p:spPr>
-        <p:txBody>
-          <a:bodyPr lIns="90000" rIns="90000" tIns="45000" bIns="45000" anchor="ctr">
-            <a:noAutofit/>
-          </a:bodyPr>
-          <a:lstStyle>
-            <a:lvl1pPr>
-              <a:defRPr b="0" lang="en-US" sz="1400" spc="-1" strike="noStrike">
-                <a:latin typeface="Times New Roman"/>
-              </a:defRPr>
-            </a:lvl1pPr>
-          </a:lstStyle>
-          <a:p>
-            <a:r>
-              <a:rPr b="0" lang="en-US" sz="1400" spc="-1" strike="noStrike">
-                <a:latin typeface="Times New Roman"/>
-              </a:rPr>
-              <a:t>&lt;date/time&gt;</a:t>
-            </a:r>
-            <a:endParaRPr b="0" lang="en-US" sz="1400" spc="-1" strike="noStrike">
-              <a:latin typeface="Times New Roman"/>
-            </a:endParaRPr>
-          </a:p>
-        </p:txBody>
-      </p:sp>
-      <p:sp>
-        <p:nvSpPr>
-          <p:cNvPr id="4" name="PlaceHolder 5"/>
-          <p:cNvSpPr>
-            <a:spLocks noGrp="1"/>
-          </p:cNvSpPr>
-          <p:nvPr>
             <p:ph type="body"/>
           </p:nvPr>
         </p:nvSpPr>
         <p:spPr>
           <a:xfrm>
             <a:off x="457200" y="1203480"/>
-            <a:ext cx="8229240" cy="2982960"/>
+            <a:ext cx="8228880" cy="2982600"/>
           </a:xfrm>
           <a:prstGeom prst="rect">
             <a:avLst/>
@@ -3211,12 +2948,12 @@
               <a:buChar char=""/>
             </a:pPr>
             <a:r>
-              <a:rPr b="0" lang="en-US" sz="3200" spc="-1" strike="noStrike">
+              <a:rPr b="0" lang="en-US" sz="1800" spc="-1" strike="noStrike">
                 <a:latin typeface="Arial"/>
               </a:rPr>
               <a:t>Click to edit the outline text format</a:t>
             </a:r>
-            <a:endParaRPr b="0" lang="en-US" sz="3200" spc="-1" strike="noStrike">
+            <a:endParaRPr b="0" lang="en-US" sz="1800" spc="-1" strike="noStrike">
               <a:latin typeface="Arial"/>
             </a:endParaRPr>
           </a:p>
@@ -3233,12 +2970,12 @@
               <a:buChar char=""/>
             </a:pPr>
             <a:r>
-              <a:rPr b="0" lang="en-US" sz="2800" spc="-1" strike="noStrike">
+              <a:rPr b="0" lang="en-US" sz="1800" spc="-1" strike="noStrike">
                 <a:latin typeface="Arial"/>
               </a:rPr>
               <a:t>Second Outline Level</a:t>
             </a:r>
-            <a:endParaRPr b="0" lang="en-US" sz="2800" spc="-1" strike="noStrike">
+            <a:endParaRPr b="0" lang="en-US" sz="1800" spc="-1" strike="noStrike">
               <a:latin typeface="Arial"/>
             </a:endParaRPr>
           </a:p>
@@ -3255,12 +2992,12 @@
               <a:buChar char=""/>
             </a:pPr>
             <a:r>
-              <a:rPr b="0" lang="en-US" sz="2400" spc="-1" strike="noStrike">
+              <a:rPr b="0" lang="en-US" sz="1800" spc="-1" strike="noStrike">
                 <a:latin typeface="Arial"/>
               </a:rPr>
               <a:t>Third Outline Level</a:t>
             </a:r>
-            <a:endParaRPr b="0" lang="en-US" sz="2400" spc="-1" strike="noStrike">
+            <a:endParaRPr b="0" lang="en-US" sz="1800" spc="-1" strike="noStrike">
               <a:latin typeface="Arial"/>
             </a:endParaRPr>
           </a:p>
@@ -3277,12 +3014,12 @@
               <a:buChar char=""/>
             </a:pPr>
             <a:r>
-              <a:rPr b="0" lang="en-US" sz="2000" spc="-1" strike="noStrike">
+              <a:rPr b="0" lang="en-US" sz="1800" spc="-1" strike="noStrike">
                 <a:latin typeface="Arial"/>
               </a:rPr>
               <a:t>Fourth Outline Level</a:t>
             </a:r>
-            <a:endParaRPr b="0" lang="en-US" sz="2000" spc="-1" strike="noStrike">
+            <a:endParaRPr b="0" lang="en-US" sz="1800" spc="-1" strike="noStrike">
               <a:latin typeface="Arial"/>
             </a:endParaRPr>
           </a:p>
@@ -3299,12 +3036,12 @@
               <a:buChar char=""/>
             </a:pPr>
             <a:r>
-              <a:rPr b="0" lang="en-US" sz="2000" spc="-1" strike="noStrike">
+              <a:rPr b="0" lang="en-US" sz="1800" spc="-1" strike="noStrike">
                 <a:latin typeface="Arial"/>
               </a:rPr>
               <a:t>Fifth Outline Level</a:t>
             </a:r>
-            <a:endParaRPr b="0" lang="en-US" sz="2000" spc="-1" strike="noStrike">
+            <a:endParaRPr b="0" lang="en-US" sz="1800" spc="-1" strike="noStrike">
               <a:latin typeface="Arial"/>
             </a:endParaRPr>
           </a:p>
@@ -3321,12 +3058,12 @@
               <a:buChar char=""/>
             </a:pPr>
             <a:r>
-              <a:rPr b="0" lang="en-US" sz="2000" spc="-1" strike="noStrike">
+              <a:rPr b="0" lang="en-US" sz="1800" spc="-1" strike="noStrike">
                 <a:latin typeface="Arial"/>
               </a:rPr>
               <a:t>Sixth Outline Level</a:t>
             </a:r>
-            <a:endParaRPr b="0" lang="en-US" sz="2000" spc="-1" strike="noStrike">
+            <a:endParaRPr b="0" lang="en-US" sz="1800" spc="-1" strike="noStrike">
               <a:latin typeface="Arial"/>
             </a:endParaRPr>
           </a:p>
@@ -3343,13 +3080,180 @@
               <a:buChar char=""/>
             </a:pPr>
             <a:r>
-              <a:rPr b="0" lang="en-US" sz="2000" spc="-1" strike="noStrike">
+              <a:rPr b="0" lang="en-US" sz="1800" spc="-1" strike="noStrike">
                 <a:latin typeface="Arial"/>
               </a:rPr>
               <a:t>Seventh Outline Level</a:t>
             </a:r>
-            <a:endParaRPr b="0" lang="en-US" sz="2000" spc="-1" strike="noStrike">
-              <a:latin typeface="Arial"/>
+            <a:endParaRPr b="0" lang="en-US" sz="1800" spc="-1" strike="noStrike">
+              <a:latin typeface="Arial"/>
+            </a:endParaRPr>
+          </a:p>
+        </p:txBody>
+      </p:sp>
+      <p:sp>
+        <p:nvSpPr>
+          <p:cNvPr id="2" name="PlaceHolder 3"/>
+          <p:cNvSpPr>
+            <a:spLocks noGrp="1"/>
+          </p:cNvSpPr>
+          <p:nvPr>
+            <p:ph type="ftr" idx="1"/>
+          </p:nvPr>
+        </p:nvSpPr>
+        <p:spPr>
+          <a:xfrm>
+            <a:off x="3029040" y="4767120"/>
+            <a:ext cx="3085200" cy="272880"/>
+          </a:xfrm>
+          <a:prstGeom prst="rect">
+            <a:avLst/>
+          </a:prstGeom>
+          <a:noFill/>
+          <a:ln w="0">
+            <a:noFill/>
+          </a:ln>
+        </p:spPr>
+        <p:txBody>
+          <a:bodyPr lIns="90000" rIns="90000" tIns="45000" bIns="45000" anchor="ctr">
+            <a:noAutofit/>
+          </a:bodyPr>
+          <a:lstStyle>
+            <a:lvl1pPr algn="ctr">
+              <a:lnSpc>
+                <a:spcPct val="100000"/>
+              </a:lnSpc>
+              <a:buNone/>
+              <a:defRPr b="0" lang="en-US" sz="1400" spc="-1" strike="noStrike">
+                <a:latin typeface="Times New Roman"/>
+              </a:defRPr>
+            </a:lvl1pPr>
+          </a:lstStyle>
+          <a:p>
+            <a:pPr algn="ctr">
+              <a:lnSpc>
+                <a:spcPct val="100000"/>
+              </a:lnSpc>
+              <a:buNone/>
+            </a:pPr>
+            <a:r>
+              <a:rPr b="0" lang="en-US" sz="1400" spc="-1" strike="noStrike">
+                <a:latin typeface="Times New Roman"/>
+              </a:rPr>
+              <a:t>&lt;footer&gt;</a:t>
+            </a:r>
+            <a:endParaRPr b="0" lang="en-US" sz="1400" spc="-1" strike="noStrike">
+              <a:latin typeface="Times New Roman"/>
+            </a:endParaRPr>
+          </a:p>
+        </p:txBody>
+      </p:sp>
+      <p:sp>
+        <p:nvSpPr>
+          <p:cNvPr id="3" name="PlaceHolder 4"/>
+          <p:cNvSpPr>
+            <a:spLocks noGrp="1"/>
+          </p:cNvSpPr>
+          <p:nvPr>
+            <p:ph type="sldNum" idx="2"/>
+          </p:nvPr>
+        </p:nvSpPr>
+        <p:spPr>
+          <a:xfrm>
+            <a:off x="6458040" y="4767120"/>
+            <a:ext cx="2056320" cy="272880"/>
+          </a:xfrm>
+          <a:prstGeom prst="rect">
+            <a:avLst/>
+          </a:prstGeom>
+          <a:noFill/>
+          <a:ln w="0">
+            <a:noFill/>
+          </a:ln>
+        </p:spPr>
+        <p:txBody>
+          <a:bodyPr lIns="90000" rIns="90000" tIns="45000" bIns="45000" anchor="ctr">
+            <a:noAutofit/>
+          </a:bodyPr>
+          <a:lstStyle>
+            <a:lvl1pPr algn="r">
+              <a:lnSpc>
+                <a:spcPct val="100000"/>
+              </a:lnSpc>
+              <a:buNone/>
+              <a:defRPr b="0" lang="en-US" sz="900" spc="-1" strike="noStrike">
+                <a:solidFill>
+                  <a:srgbClr val="8b8b8b"/>
+                </a:solidFill>
+                <a:latin typeface="Calibri"/>
+              </a:defRPr>
+            </a:lvl1pPr>
+          </a:lstStyle>
+          <a:p>
+            <a:pPr algn="r">
+              <a:lnSpc>
+                <a:spcPct val="100000"/>
+              </a:lnSpc>
+              <a:buNone/>
+            </a:pPr>
+            <a:fld id="{3B0BDACA-F8F6-4D86-9D98-23177B59CFA3}" type="slidenum">
+              <a:rPr b="0" lang="en-US" sz="900" spc="-1" strike="noStrike">
+                <a:solidFill>
+                  <a:srgbClr val="8b8b8b"/>
+                </a:solidFill>
+                <a:latin typeface="Calibri"/>
+              </a:rPr>
+              <a:t>&lt;number&gt;</a:t>
+            </a:fld>
+            <a:endParaRPr b="0" lang="en-US" sz="900" spc="-1" strike="noStrike">
+              <a:latin typeface="Times New Roman"/>
+            </a:endParaRPr>
+          </a:p>
+        </p:txBody>
+      </p:sp>
+      <p:sp>
+        <p:nvSpPr>
+          <p:cNvPr id="4" name="PlaceHolder 5"/>
+          <p:cNvSpPr>
+            <a:spLocks noGrp="1"/>
+          </p:cNvSpPr>
+          <p:nvPr>
+            <p:ph type="dt" idx="3"/>
+          </p:nvPr>
+        </p:nvSpPr>
+        <p:spPr>
+          <a:xfrm>
+            <a:off x="628560" y="4767120"/>
+            <a:ext cx="2056320" cy="272880"/>
+          </a:xfrm>
+          <a:prstGeom prst="rect">
+            <a:avLst/>
+          </a:prstGeom>
+          <a:noFill/>
+          <a:ln w="0">
+            <a:noFill/>
+          </a:ln>
+        </p:spPr>
+        <p:txBody>
+          <a:bodyPr lIns="90000" rIns="90000" tIns="45000" bIns="45000" anchor="ctr">
+            <a:noAutofit/>
+          </a:bodyPr>
+          <a:lstStyle>
+            <a:lvl1pPr>
+              <a:defRPr b="0" lang="en-US" sz="1400" spc="-1" strike="noStrike">
+                <a:latin typeface="Times New Roman"/>
+              </a:defRPr>
+            </a:lvl1pPr>
+          </a:lstStyle>
+          <a:p>
+            <a:r>
+              <a:rPr b="0" lang="en-US" sz="1400" spc="-1" strike="noStrike">
+                <a:latin typeface="Times New Roman"/>
+              </a:rPr>
+              <a:t>&lt;date/time&gt;</a:t>
+            </a:r>
+            <a:endParaRPr b="0" lang="en-US" sz="1400" spc="-1" strike="noStrike">
+              <a:latin typeface="Times New Roman"/>
             </a:endParaRPr>
           </a:p>
         </p:txBody>
@@ -3400,7 +3304,7 @@
         <p:spPr>
           <a:xfrm>
             <a:off x="186840" y="178200"/>
-            <a:ext cx="8769960" cy="4757760"/>
+            <a:ext cx="8769600" cy="4757400"/>
           </a:xfrm>
           <a:prstGeom prst="roundRect">
             <a:avLst>
@@ -3438,7 +3342,7 @@
         <p:spPr>
           <a:xfrm>
             <a:off x="460080" y="622080"/>
-            <a:ext cx="6925680" cy="3306600"/>
+            <a:ext cx="6925320" cy="3306240"/>
           </a:xfrm>
           <a:prstGeom prst="rect">
             <a:avLst/>
@@ -3494,7 +3398,7 @@
         <p:spPr>
           <a:xfrm>
             <a:off x="5753880" y="2557440"/>
-            <a:ext cx="4009680" cy="3133080"/>
+            <a:ext cx="4009320" cy="3132720"/>
           </a:xfrm>
           <a:prstGeom prst="rect">
             <a:avLst/>
@@ -3547,7 +3451,7 @@
         <p:spPr>
           <a:xfrm>
             <a:off x="5753880" y="2557440"/>
-            <a:ext cx="4009680" cy="3133080"/>
+            <a:ext cx="4009320" cy="3132720"/>
           </a:xfrm>
           <a:prstGeom prst="rect">
             <a:avLst/>
@@ -3566,7 +3470,7 @@
         <p:spPr>
           <a:xfrm>
             <a:off x="185760" y="831240"/>
-            <a:ext cx="899280" cy="899280"/>
+            <a:ext cx="898920" cy="898920"/>
           </a:xfrm>
           <a:prstGeom prst="ellipse">
             <a:avLst/>
@@ -3626,7 +3530,7 @@
         <p:spPr>
           <a:xfrm>
             <a:off x="185760" y="2381400"/>
-            <a:ext cx="899280" cy="887400"/>
+            <a:ext cx="898920" cy="887040"/>
           </a:xfrm>
           <a:prstGeom prst="ellipse">
             <a:avLst/>
@@ -3686,7 +3590,7 @@
         <p:spPr>
           <a:xfrm>
             <a:off x="185760" y="3860640"/>
-            <a:ext cx="899280" cy="899280"/>
+            <a:ext cx="898920" cy="898920"/>
           </a:xfrm>
           <a:prstGeom prst="ellipse">
             <a:avLst/>
@@ -3746,7 +3650,7 @@
         <p:spPr>
           <a:xfrm>
             <a:off x="967680" y="797040"/>
-            <a:ext cx="3764520" cy="550440"/>
+            <a:ext cx="3764160" cy="550080"/>
           </a:xfrm>
           <a:prstGeom prst="rect">
             <a:avLst/>
@@ -3808,7 +3712,7 @@
         <p:spPr>
           <a:xfrm>
             <a:off x="967680" y="1332720"/>
-            <a:ext cx="3764520" cy="789480"/>
+            <a:ext cx="3764160" cy="789120"/>
           </a:xfrm>
           <a:prstGeom prst="rect">
             <a:avLst/>
@@ -3870,7 +3774,7 @@
         <p:spPr>
           <a:xfrm>
             <a:off x="964080" y="2292480"/>
-            <a:ext cx="3764520" cy="550440"/>
+            <a:ext cx="3764160" cy="550080"/>
           </a:xfrm>
           <a:prstGeom prst="rect">
             <a:avLst/>
@@ -3922,7 +3826,7 @@
         <p:spPr>
           <a:xfrm>
             <a:off x="964080" y="2825280"/>
-            <a:ext cx="3764520" cy="843120"/>
+            <a:ext cx="3764160" cy="842760"/>
           </a:xfrm>
           <a:prstGeom prst="rect">
             <a:avLst/>
@@ -3984,7 +3888,7 @@
         <p:spPr>
           <a:xfrm>
             <a:off x="964080" y="3777840"/>
-            <a:ext cx="3764520" cy="550440"/>
+            <a:ext cx="3764160" cy="550080"/>
           </a:xfrm>
           <a:prstGeom prst="rect">
             <a:avLst/>
@@ -4036,7 +3940,7 @@
         <p:spPr>
           <a:xfrm>
             <a:off x="964080" y="4310640"/>
-            <a:ext cx="3764520" cy="794520"/>
+            <a:ext cx="3764160" cy="794160"/>
           </a:xfrm>
           <a:prstGeom prst="rect">
             <a:avLst/>
@@ -4098,7 +4002,7 @@
         <p:spPr>
           <a:xfrm>
             <a:off x="5084640" y="987840"/>
-            <a:ext cx="3687480" cy="3496680"/>
+            <a:ext cx="3687120" cy="3496320"/>
           </a:xfrm>
           <a:prstGeom prst="roundRect">
             <a:avLst>
@@ -4162,7 +4066,7 @@
         <p:spPr>
           <a:xfrm>
             <a:off x="8519760" y="4831560"/>
-            <a:ext cx="484560" cy="226800"/>
+            <a:ext cx="484200" cy="226800"/>
           </a:xfrm>
           <a:prstGeom prst="rect">
             <a:avLst/>
@@ -4214,7 +4118,7 @@
         <p:spPr>
           <a:xfrm>
             <a:off x="421200" y="228600"/>
-            <a:ext cx="8457840" cy="685440"/>
+            <a:ext cx="8457480" cy="685080"/>
           </a:xfrm>
           <a:prstGeom prst="rect">
             <a:avLst/>
@@ -4243,7 +4147,11 @@
             </a:pPr>
             <a:r>
               <a:rPr b="0" lang="en-US" sz="1800" spc="-1" strike="noStrike">
+                <a:solidFill>
+                  <a:srgbClr val="000000"/>
+                </a:solidFill>
                 <a:latin typeface="Arial"/>
+                <a:ea typeface="DejaVu Sans"/>
               </a:rPr>
               <a:t>TITLE</a:t>
             </a:r>
@@ -4292,7 +4200,7 @@
         <p:spPr>
           <a:xfrm>
             <a:off x="506520" y="1484640"/>
-            <a:ext cx="2556720" cy="2055240"/>
+            <a:ext cx="2556360" cy="2054880"/>
           </a:xfrm>
           <a:prstGeom prst="roundRect">
             <a:avLst>
@@ -4332,7 +4240,7 @@
         <p:spPr>
           <a:xfrm>
             <a:off x="624240" y="1616760"/>
-            <a:ext cx="2289600" cy="729000"/>
+            <a:ext cx="2289240" cy="728640"/>
           </a:xfrm>
           <a:prstGeom prst="rect">
             <a:avLst/>
@@ -4384,7 +4292,7 @@
         <p:spPr>
           <a:xfrm>
             <a:off x="624240" y="2400480"/>
-            <a:ext cx="2289600" cy="1162080"/>
+            <a:ext cx="2289240" cy="1161720"/>
           </a:xfrm>
           <a:prstGeom prst="rect">
             <a:avLst/>
@@ -4446,7 +4354,7 @@
         <p:spPr>
           <a:xfrm>
             <a:off x="3309120" y="2066040"/>
-            <a:ext cx="2556720" cy="2055240"/>
+            <a:ext cx="2556360" cy="2054880"/>
           </a:xfrm>
           <a:prstGeom prst="roundRect">
             <a:avLst>
@@ -4486,7 +4394,7 @@
         <p:spPr>
           <a:xfrm>
             <a:off x="3426840" y="2198160"/>
-            <a:ext cx="2289600" cy="729000"/>
+            <a:ext cx="2289240" cy="728640"/>
           </a:xfrm>
           <a:prstGeom prst="rect">
             <a:avLst/>
@@ -4538,7 +4446,7 @@
         <p:spPr>
           <a:xfrm>
             <a:off x="3426840" y="2981880"/>
-            <a:ext cx="2289600" cy="1162080"/>
+            <a:ext cx="2289240" cy="1161720"/>
           </a:xfrm>
           <a:prstGeom prst="rect">
             <a:avLst/>
@@ -4590,7 +4498,7 @@
         <p:spPr>
           <a:xfrm>
             <a:off x="6111720" y="2659320"/>
-            <a:ext cx="2556720" cy="2055240"/>
+            <a:ext cx="2556360" cy="2054880"/>
           </a:xfrm>
           <a:prstGeom prst="roundRect">
             <a:avLst>
@@ -4630,7 +4538,7 @@
         <p:spPr>
           <a:xfrm>
             <a:off x="6229440" y="2791440"/>
-            <a:ext cx="2289600" cy="729000"/>
+            <a:ext cx="2289240" cy="728640"/>
           </a:xfrm>
           <a:prstGeom prst="rect">
             <a:avLst/>
@@ -4665,7 +4573,7 @@
                 <a:latin typeface="Arial"/>
                 <a:ea typeface="DejaVu Sans"/>
               </a:rPr>
-              <a:t>SUBTITLE2</a:t>
+              <a:t>SUBTITLE3</a:t>
             </a:r>
             <a:endParaRPr b="0" lang="en-US" sz="1400" spc="-1" strike="noStrike">
               <a:latin typeface="Arial"/>
@@ -4682,7 +4590,7 @@
         <p:spPr>
           <a:xfrm>
             <a:off x="6229440" y="3574800"/>
-            <a:ext cx="2289600" cy="1162080"/>
+            <a:ext cx="2289240" cy="1161720"/>
           </a:xfrm>
           <a:prstGeom prst="rect">
             <a:avLst/>
@@ -4717,7 +4625,7 @@
                 <a:latin typeface="Arial"/>
                 <a:ea typeface="DejaVu Sans"/>
               </a:rPr>
-              <a:t>TEXT2</a:t>
+              <a:t>TEXT3</a:t>
             </a:r>
             <a:endParaRPr b="0" lang="en-US" sz="1100" spc="-1" strike="noStrike">
               <a:latin typeface="Arial"/>
@@ -4734,7 +4642,7 @@
         <p:spPr>
           <a:xfrm>
             <a:off x="8519760" y="4831560"/>
-            <a:ext cx="484560" cy="226800"/>
+            <a:ext cx="484200" cy="226800"/>
           </a:xfrm>
           <a:prstGeom prst="rect">
             <a:avLst/>
@@ -4786,7 +4694,7 @@
         <p:spPr>
           <a:xfrm>
             <a:off x="457200" y="228600"/>
-            <a:ext cx="8229240" cy="1142640"/>
+            <a:ext cx="8228880" cy="1142280"/>
           </a:xfrm>
           <a:prstGeom prst="rect">
             <a:avLst/>
@@ -4815,7 +4723,11 @@
             </a:pPr>
             <a:r>
               <a:rPr b="0" lang="en-US" sz="1800" spc="-1" strike="noStrike">
+                <a:solidFill>
+                  <a:srgbClr val="000000"/>
+                </a:solidFill>
                 <a:latin typeface="Arial"/>
+                <a:ea typeface="DejaVu Sans"/>
               </a:rPr>
               <a:t>TITLE</a:t>
             </a:r>
@@ -4864,7 +4776,7 @@
         <p:spPr>
           <a:xfrm>
             <a:off x="3601800" y="3271680"/>
-            <a:ext cx="5236200" cy="1320840"/>
+            <a:ext cx="5235840" cy="1320480"/>
           </a:xfrm>
           <a:prstGeom prst="roundRect">
             <a:avLst>
@@ -4902,7 +4814,7 @@
         <p:spPr>
           <a:xfrm>
             <a:off x="6308640" y="1028880"/>
-            <a:ext cx="2532960" cy="2056680"/>
+            <a:ext cx="2532600" cy="2056320"/>
           </a:xfrm>
           <a:prstGeom prst="roundRect">
             <a:avLst>
@@ -4940,7 +4852,7 @@
         <p:spPr>
           <a:xfrm>
             <a:off x="3604320" y="1014480"/>
-            <a:ext cx="2532960" cy="2056680"/>
+            <a:ext cx="2532600" cy="2056320"/>
           </a:xfrm>
           <a:prstGeom prst="roundRect">
             <a:avLst>
@@ -4978,7 +4890,7 @@
         <p:spPr>
           <a:xfrm>
             <a:off x="3696480" y="1059120"/>
-            <a:ext cx="2343240" cy="713520"/>
+            <a:ext cx="2342880" cy="713160"/>
           </a:xfrm>
           <a:prstGeom prst="rect">
             <a:avLst/>
@@ -5040,7 +4952,7 @@
         <p:spPr>
           <a:xfrm>
             <a:off x="3696480" y="1843560"/>
-            <a:ext cx="2343240" cy="1141920"/>
+            <a:ext cx="2342880" cy="1141560"/>
           </a:xfrm>
           <a:prstGeom prst="rect">
             <a:avLst/>
@@ -5102,7 +5014,7 @@
         <p:spPr>
           <a:xfrm>
             <a:off x="6400080" y="1059120"/>
-            <a:ext cx="2340000" cy="713520"/>
+            <a:ext cx="2339640" cy="713160"/>
           </a:xfrm>
           <a:prstGeom prst="rect">
             <a:avLst/>
@@ -5154,7 +5066,7 @@
         <p:spPr>
           <a:xfrm>
             <a:off x="6400080" y="1843560"/>
-            <a:ext cx="2340000" cy="1141920"/>
+            <a:ext cx="2339640" cy="1141560"/>
           </a:xfrm>
           <a:prstGeom prst="rect">
             <a:avLst/>
@@ -5216,7 +5128,7 @@
         <p:spPr>
           <a:xfrm>
             <a:off x="3696480" y="3362040"/>
-            <a:ext cx="5236200" cy="328680"/>
+            <a:ext cx="5235840" cy="328320"/>
           </a:xfrm>
           <a:prstGeom prst="rect">
             <a:avLst/>
@@ -5268,7 +5180,7 @@
         <p:spPr>
           <a:xfrm>
             <a:off x="3696480" y="3713400"/>
-            <a:ext cx="5146560" cy="713520"/>
+            <a:ext cx="5146200" cy="713160"/>
           </a:xfrm>
           <a:prstGeom prst="rect">
             <a:avLst/>
@@ -5330,7 +5242,7 @@
         <p:spPr>
           <a:xfrm>
             <a:off x="384840" y="1028880"/>
-            <a:ext cx="3002400" cy="3564000"/>
+            <a:ext cx="3002040" cy="3563640"/>
           </a:xfrm>
           <a:prstGeom prst="roundRect">
             <a:avLst>
@@ -5394,7 +5306,7 @@
         <p:spPr>
           <a:xfrm>
             <a:off x="8519760" y="4831560"/>
-            <a:ext cx="484560" cy="226800"/>
+            <a:ext cx="484200" cy="226800"/>
           </a:xfrm>
           <a:prstGeom prst="rect">
             <a:avLst/>
@@ -5446,7 +5358,7 @@
         <p:spPr>
           <a:xfrm>
             <a:off x="313200" y="228600"/>
-            <a:ext cx="8457840" cy="685440"/>
+            <a:ext cx="8457480" cy="685080"/>
           </a:xfrm>
           <a:prstGeom prst="rect">
             <a:avLst/>
@@ -5475,7 +5387,11 @@
             </a:pPr>
             <a:r>
               <a:rPr b="0" lang="en-US" sz="1800" spc="-1" strike="noStrike">
+                <a:solidFill>
+                  <a:srgbClr val="000000"/>
+                </a:solidFill>
                 <a:latin typeface="Arial"/>
+                <a:ea typeface="DejaVu Sans"/>
               </a:rPr>
               <a:t>TITLE</a:t>
             </a:r>
@@ -5528,7 +5444,7 @@
         <p:spPr>
           <a:xfrm>
             <a:off x="-877680" y="2245320"/>
-            <a:ext cx="4613040" cy="3604680"/>
+            <a:ext cx="4612680" cy="3604320"/>
           </a:xfrm>
           <a:prstGeom prst="rect">
             <a:avLst/>
@@ -5547,7 +5463,7 @@
         <p:spPr>
           <a:xfrm>
             <a:off x="4157640" y="631080"/>
-            <a:ext cx="899280" cy="899280"/>
+            <a:ext cx="898920" cy="898920"/>
           </a:xfrm>
           <a:prstGeom prst="ellipse">
             <a:avLst/>
@@ -5609,7 +5525,7 @@
         <p:spPr>
           <a:xfrm>
             <a:off x="4157640" y="2127600"/>
-            <a:ext cx="899280" cy="887400"/>
+            <a:ext cx="898920" cy="887040"/>
           </a:xfrm>
           <a:prstGeom prst="ellipse">
             <a:avLst/>
@@ -5671,7 +5587,7 @@
         <p:spPr>
           <a:xfrm>
             <a:off x="4157640" y="3612240"/>
-            <a:ext cx="899280" cy="899280"/>
+            <a:ext cx="898920" cy="898920"/>
           </a:xfrm>
           <a:prstGeom prst="ellipse">
             <a:avLst/>
@@ -5733,7 +5649,7 @@
         <p:spPr>
           <a:xfrm>
             <a:off x="5146560" y="489600"/>
-            <a:ext cx="3578760" cy="550440"/>
+            <a:ext cx="3578400" cy="550080"/>
           </a:xfrm>
           <a:prstGeom prst="rect">
             <a:avLst/>
@@ -5795,7 +5711,7 @@
         <p:spPr>
           <a:xfrm>
             <a:off x="5146560" y="1025280"/>
-            <a:ext cx="3578760" cy="789480"/>
+            <a:ext cx="3578400" cy="789120"/>
           </a:xfrm>
           <a:prstGeom prst="rect">
             <a:avLst/>
@@ -5857,7 +5773,7 @@
         <p:spPr>
           <a:xfrm>
             <a:off x="5142960" y="1985400"/>
-            <a:ext cx="3578760" cy="550440"/>
+            <a:ext cx="3578400" cy="550080"/>
           </a:xfrm>
           <a:prstGeom prst="rect">
             <a:avLst/>
@@ -5909,7 +5825,7 @@
         <p:spPr>
           <a:xfrm>
             <a:off x="5142960" y="2517840"/>
-            <a:ext cx="3578760" cy="843120"/>
+            <a:ext cx="3578400" cy="842760"/>
           </a:xfrm>
           <a:prstGeom prst="rect">
             <a:avLst/>
@@ -5971,7 +5887,7 @@
         <p:spPr>
           <a:xfrm>
             <a:off x="5142960" y="3470760"/>
-            <a:ext cx="3578760" cy="550440"/>
+            <a:ext cx="3578400" cy="550080"/>
           </a:xfrm>
           <a:prstGeom prst="rect">
             <a:avLst/>
@@ -6023,7 +5939,7 @@
         <p:spPr>
           <a:xfrm>
             <a:off x="5142960" y="4003560"/>
-            <a:ext cx="3578760" cy="794520"/>
+            <a:ext cx="3578400" cy="794160"/>
           </a:xfrm>
           <a:prstGeom prst="rect">
             <a:avLst/>
@@ -6085,7 +6001,7 @@
         <p:spPr>
           <a:xfrm>
             <a:off x="8519760" y="4831560"/>
-            <a:ext cx="484560" cy="226800"/>
+            <a:ext cx="484200" cy="226800"/>
           </a:xfrm>
           <a:prstGeom prst="rect">
             <a:avLst/>
@@ -6137,7 +6053,7 @@
         <p:spPr>
           <a:xfrm>
             <a:off x="264600" y="228600"/>
-            <a:ext cx="3657240" cy="2016360"/>
+            <a:ext cx="3656880" cy="2016000"/>
           </a:xfrm>
           <a:prstGeom prst="rect">
             <a:avLst/>
@@ -6166,7 +6082,11 @@
             </a:pPr>
             <a:r>
               <a:rPr b="0" lang="en-US" sz="1800" spc="-1" strike="noStrike">
+                <a:solidFill>
+                  <a:srgbClr val="000000"/>
+                </a:solidFill>
                 <a:latin typeface="Arial"/>
+                <a:ea typeface="DejaVu Sans"/>
               </a:rPr>
               <a:t>TITLE</a:t>
             </a:r>
@@ -6215,7 +6135,7 @@
         <p:spPr>
           <a:xfrm>
             <a:off x="4238640" y="831240"/>
-            <a:ext cx="899280" cy="899280"/>
+            <a:ext cx="898920" cy="898920"/>
           </a:xfrm>
           <a:prstGeom prst="ellipse">
             <a:avLst/>
@@ -6275,7 +6195,7 @@
         <p:spPr>
           <a:xfrm>
             <a:off x="4238640" y="2243880"/>
-            <a:ext cx="899280" cy="887400"/>
+            <a:ext cx="898920" cy="887040"/>
           </a:xfrm>
           <a:prstGeom prst="ellipse">
             <a:avLst/>
@@ -6335,7 +6255,7 @@
         <p:spPr>
           <a:xfrm>
             <a:off x="4238640" y="3667320"/>
-            <a:ext cx="899280" cy="899280"/>
+            <a:ext cx="898920" cy="898920"/>
           </a:xfrm>
           <a:prstGeom prst="ellipse">
             <a:avLst/>
@@ -6395,7 +6315,7 @@
         <p:spPr>
           <a:xfrm>
             <a:off x="5020200" y="797040"/>
-            <a:ext cx="3764520" cy="550440"/>
+            <a:ext cx="3764160" cy="550080"/>
           </a:xfrm>
           <a:prstGeom prst="rect">
             <a:avLst/>
@@ -6457,7 +6377,7 @@
         <p:spPr>
           <a:xfrm>
             <a:off x="5020200" y="1332720"/>
-            <a:ext cx="3764520" cy="789480"/>
+            <a:ext cx="3764160" cy="789120"/>
           </a:xfrm>
           <a:prstGeom prst="rect">
             <a:avLst/>
@@ -6519,7 +6439,7 @@
         <p:spPr>
           <a:xfrm>
             <a:off x="5016600" y="2155320"/>
-            <a:ext cx="3764520" cy="550440"/>
+            <a:ext cx="3764160" cy="550080"/>
           </a:xfrm>
           <a:prstGeom prst="rect">
             <a:avLst/>
@@ -6571,7 +6491,7 @@
         <p:spPr>
           <a:xfrm>
             <a:off x="5016600" y="2687760"/>
-            <a:ext cx="3764520" cy="843120"/>
+            <a:ext cx="3764160" cy="842760"/>
           </a:xfrm>
           <a:prstGeom prst="rect">
             <a:avLst/>
@@ -6633,7 +6553,7 @@
         <p:spPr>
           <a:xfrm>
             <a:off x="5016600" y="3584880"/>
-            <a:ext cx="3764520" cy="550440"/>
+            <a:ext cx="3764160" cy="550080"/>
           </a:xfrm>
           <a:prstGeom prst="rect">
             <a:avLst/>
@@ -6685,7 +6605,7 @@
         <p:spPr>
           <a:xfrm>
             <a:off x="5016600" y="4117320"/>
-            <a:ext cx="3764520" cy="794520"/>
+            <a:ext cx="3764160" cy="794160"/>
           </a:xfrm>
           <a:prstGeom prst="rect">
             <a:avLst/>
@@ -6747,7 +6667,7 @@
         <p:spPr>
           <a:xfrm>
             <a:off x="384840" y="987840"/>
-            <a:ext cx="3687480" cy="3496680"/>
+            <a:ext cx="3687120" cy="3496320"/>
           </a:xfrm>
           <a:prstGeom prst="roundRect">
             <a:avLst>
@@ -6811,7 +6731,7 @@
         <p:spPr>
           <a:xfrm>
             <a:off x="8519760" y="4831560"/>
-            <a:ext cx="484560" cy="226800"/>
+            <a:ext cx="484200" cy="226800"/>
           </a:xfrm>
           <a:prstGeom prst="rect">
             <a:avLst/>
@@ -6863,7 +6783,7 @@
         <p:spPr>
           <a:xfrm>
             <a:off x="300600" y="228600"/>
-            <a:ext cx="8614440" cy="685440"/>
+            <a:ext cx="8614080" cy="685080"/>
           </a:xfrm>
           <a:prstGeom prst="rect">
             <a:avLst/>
@@ -6892,7 +6812,11 @@
             </a:pPr>
             <a:r>
               <a:rPr b="0" lang="en-US" sz="1800" spc="-1" strike="noStrike">
+                <a:solidFill>
+                  <a:srgbClr val="000000"/>
+                </a:solidFill>
                 <a:latin typeface="Arial"/>
+                <a:ea typeface="DejaVu Sans"/>
               </a:rPr>
               <a:t>TITLE</a:t>
             </a:r>
@@ -6941,7 +6865,7 @@
         <p:spPr>
           <a:xfrm>
             <a:off x="186840" y="178200"/>
-            <a:ext cx="8769960" cy="4757760"/>
+            <a:ext cx="8769600" cy="4757400"/>
           </a:xfrm>
           <a:prstGeom prst="roundRect">
             <a:avLst>
@@ -6979,7 +6903,7 @@
         <p:spPr>
           <a:xfrm>
             <a:off x="460080" y="622080"/>
-            <a:ext cx="6925680" cy="3306600"/>
+            <a:ext cx="6925320" cy="3306240"/>
           </a:xfrm>
           <a:prstGeom prst="rect">
             <a:avLst/>
@@ -7035,7 +6959,7 @@
         <p:spPr>
           <a:xfrm>
             <a:off x="5753880" y="2557440"/>
-            <a:ext cx="4009680" cy="3133080"/>
+            <a:ext cx="4009320" cy="3132720"/>
           </a:xfrm>
           <a:prstGeom prst="rect">
             <a:avLst/>
